--- a/workshops/session7-self-supervised.pptx
+++ b/workshops/session7-self-supervised.pptx
@@ -508,7 +508,8 @@
           <a:p>
             <a:r>
               <a:rPr lang="en-US" dirty="0"/>
-              <a:t/>
+              <a:t>یادگیری خودنظارتی: آموزش LLM بدون برچسب دستی.
+سؤال شروع: «ChatGPT میلیاردها جمله خوانده — چه کسی همهٔ آن‌ها را برچسب زده؟»</a:t>
             </a:r>
             <a:endParaRPr lang="en-US" dirty="0"/>
           </a:p>
@@ -596,7 +597,7 @@
           <a:p>
             <a:r>
               <a:rPr lang="en-US" dirty="0"/>
-              <a:t/>
+              <a:t>مرور: Transformer = دیدن هم‌زمان + Attention + لایه‌ها.</a:t>
             </a:r>
             <a:endParaRPr lang="en-US" dirty="0"/>
           </a:p>
@@ -684,7 +685,7 @@
           <a:p>
             <a:r>
               <a:rPr lang="en-US" dirty="0"/>
-              <a:t/>
+              <a:t>پل بزنید: جلسهٔ ۳ = «چه می‌کند»، جلسهٔ ۷ = «چطور یاد گرفته».</a:t>
             </a:r>
             <a:endParaRPr lang="en-US" dirty="0"/>
           </a:p>
@@ -772,7 +773,9 @@
           <a:p>
             <a:r>
               <a:rPr lang="en-US" dirty="0"/>
-              <a:t/>
+              <a:t>جدول مقایسه را با مثال توضیح دهید.
+نظارت‌شده: مثل معلمی که هر تمرین را تصحیح می‌کند.
+خودنظارتی: مثل دانش‌آموزی که خودش جواب را چک می‌کند.</a:t>
             </a:r>
             <a:endParaRPr lang="en-US" dirty="0"/>
           </a:p>
@@ -860,7 +863,11 @@
           <a:p>
             <a:r>
               <a:rPr lang="en-US" dirty="0"/>
-              <a:t/>
+              <a:t>مثال کارشته (بازی کلمهٔ گمشده):
+1. بنویسید: «گربه روی ___ نشست» و از کلاس حدس بخواهید: موکت؟ زمین؟ مبل؟
+2. بگویید پاسخ درست همان کلمه‌ای است که خودتان پاک کرده‌اید؛ یعنی پاسخ‌نامه در دلِ خودِ سؤال بود.
+3. حالا تصور کنید همین بازی را با همهٔ جمله‌های اینترنت انجام دهید: میلیاردها تمرین رایگان.
+نکتهٔ طلایی: «خودنظارتی یعنی معلم، خودِ داده است.»</a:t>
             </a:r>
             <a:endParaRPr lang="en-US" dirty="0"/>
           </a:p>
@@ -948,7 +955,9 @@
           <a:p>
             <a:r>
               <a:rPr lang="en-US" dirty="0"/>
-              <a:t/>
+              <a:t>تأکید: مقیاس داده کلیدی است.
+مثال: اگر ۱۰۰۰ جمله بخوانید، فقط کلمات رایج را یاد می‌گیرید.
+اگر میلیاردها جمله بخوانید، الگوهای ظریف زبان (مثل ضمیر-مرجع) هم یاد می‌گیرید.</a:t>
             </a:r>
             <a:endParaRPr lang="en-US" dirty="0"/>
           </a:p>
@@ -1036,7 +1045,8 @@
           <a:p>
             <a:r>
               <a:rPr lang="en-US" dirty="0"/>
-              <a:t/>
+              <a:t>سؤال: «اگر بخواهید یک LLM آموزش دهید، چقدر متن نیاز دارید؟»
+جواب: ChatGPT با صدها میلیارد کلمه آموزش دیده — برابر با میلیون‌ها کتاب.</a:t>
             </a:r>
             <a:endParaRPr lang="en-US" dirty="0"/>
           </a:p>
@@ -1787,7 +1797,7 @@
       </p:sp>
       <p:sp>
         <p:nvSpPr>
-          <p:cNvPr id="5" name="Text 3"/>
+          <p:cNvPr id="6" name="Text 3"/>
           <p:cNvSpPr/>
           <p:nvPr/>
         </p:nvSpPr>
@@ -1826,7 +1836,7 @@
       </p:sp>
       <p:sp>
         <p:nvSpPr>
-          <p:cNvPr id="6" name="Text 4"/>
+          <p:cNvPr id="7" name="Text 4"/>
           <p:cNvSpPr/>
           <p:nvPr/>
         </p:nvSpPr>
@@ -2023,7 +2033,7 @@
       </p:sp>
       <p:sp>
         <p:nvSpPr>
-          <p:cNvPr id="5" name="Text 3"/>
+          <p:cNvPr id="6" name="Text 3"/>
           <p:cNvSpPr/>
           <p:nvPr/>
         </p:nvSpPr>
@@ -2062,7 +2072,7 @@
       </p:sp>
       <p:sp>
         <p:nvSpPr>
-          <p:cNvPr id="6" name="Text 4"/>
+          <p:cNvPr id="7" name="Text 4"/>
           <p:cNvSpPr/>
           <p:nvPr/>
         </p:nvSpPr>
@@ -3242,7 +3252,7 @@
       </p:graphicFrame>
       <p:sp>
         <p:nvSpPr>
-          <p:cNvPr id="5" name="Text 2"/>
+          <p:cNvPr id="6" name="Text 2"/>
           <p:cNvSpPr/>
           <p:nvPr/>
         </p:nvSpPr>
@@ -3281,7 +3291,7 @@
       </p:sp>
       <p:sp>
         <p:nvSpPr>
-          <p:cNvPr id="6" name="Text 3"/>
+          <p:cNvPr id="7" name="Text 3"/>
           <p:cNvSpPr/>
           <p:nvPr/>
         </p:nvSpPr>
@@ -3834,7 +3844,7 @@
       </p:sp>
       <p:sp>
         <p:nvSpPr>
-          <p:cNvPr id="17" name="Text 15"/>
+          <p:cNvPr id="18" name="Text 15"/>
           <p:cNvSpPr/>
           <p:nvPr/>
         </p:nvSpPr>
@@ -3873,7 +3883,7 @@
       </p:sp>
       <p:sp>
         <p:nvSpPr>
-          <p:cNvPr id="18" name="Text 16"/>
+          <p:cNvPr id="19" name="Text 16"/>
           <p:cNvSpPr/>
           <p:nvPr/>
         </p:nvSpPr>
@@ -4091,7 +4101,7 @@
       </p:sp>
       <p:sp>
         <p:nvSpPr>
-          <p:cNvPr id="5" name="Text 3"/>
+          <p:cNvPr id="6" name="Text 3"/>
           <p:cNvSpPr/>
           <p:nvPr/>
         </p:nvSpPr>
@@ -4130,7 +4140,7 @@
       </p:sp>
       <p:sp>
         <p:nvSpPr>
-          <p:cNvPr id="6" name="Text 4"/>
+          <p:cNvPr id="7" name="Text 4"/>
           <p:cNvSpPr/>
           <p:nvPr/>
         </p:nvSpPr>
@@ -4348,7 +4358,7 @@
       </p:sp>
       <p:sp>
         <p:nvSpPr>
-          <p:cNvPr id="5" name="Text 3"/>
+          <p:cNvPr id="6" name="Text 3"/>
           <p:cNvSpPr/>
           <p:nvPr/>
         </p:nvSpPr>
@@ -4387,7 +4397,7 @@
       </p:sp>
       <p:sp>
         <p:nvSpPr>
-          <p:cNvPr id="6" name="Text 4"/>
+          <p:cNvPr id="7" name="Text 4"/>
           <p:cNvSpPr/>
           <p:nvPr/>
         </p:nvSpPr>
